--- a/Clase_6/PPT/Clase06_Comparacion_de_Grupos.pptx
+++ b/Clase_6/PPT/Clase06_Comparacion_de_Grupos.pptx
@@ -7342,7 +7342,7 @@
           <p:nvPr>
             <p:extLst>
               <p:ext uri="{D42A27DB-BD31-4B8C-83A1-F6EECF244321}">
-                <p14:modId xmlns:p14="http://schemas.microsoft.com/office/powerpoint/2010/main" val="1579011935"/>
+                <p14:modId xmlns:p14="http://schemas.microsoft.com/office/powerpoint/2010/main" val="224899506"/>
               </p:ext>
             </p:extLst>
           </p:nvPr>
@@ -11968,9 +11968,20 @@
                 <a:ea typeface="Calibri" pitchFamily="34" charset="-122"/>
                 <a:cs typeface="Calibri" pitchFamily="34" charset="-120"/>
               </a:rPr>
-              <a:t>Si tienes hipótesis concretas de antemano («¿agencia es más lenta que app?»), la estrategia A es más directa y más potente. El ANOVA sirve cuando la pregunta genuinamente es «¿hay alguna diferencia en algún lado?».</a:t>
+              <a:t>Si tienes hipótesis concretas de antemano («¿agencia es más lenta que app?»), la estrategia A es más directa y más potente. </a:t>
             </a:r>
-            <a:endParaRPr lang="en-US" sz="1150" dirty="0"/>
+            <a:r>
+              <a:rPr lang="en-US" sz="1150" b="1" dirty="0">
+                <a:solidFill>
+                  <a:srgbClr val="2C3A55"/>
+                </a:solidFill>
+                <a:latin typeface="Calibri" pitchFamily="34" charset="0"/>
+                <a:ea typeface="Calibri" pitchFamily="34" charset="-122"/>
+                <a:cs typeface="Calibri" pitchFamily="34" charset="-120"/>
+              </a:rPr>
+              <a:t>El ANOVA sirve cuando la pregunta genuinamente es «¿hay alguna diferencia en algún lado?».</a:t>
+            </a:r>
+            <a:endParaRPr lang="en-US" sz="1150" b="1" dirty="0"/>
           </a:p>
         </p:txBody>
       </p:sp>
@@ -23386,7 +23397,7 @@
         </p:nvSpPr>
         <p:spPr>
           <a:xfrm>
-            <a:off x="548640" y="4956048"/>
+            <a:off x="521208" y="4964286"/>
             <a:ext cx="11091672" cy="1188720"/>
           </a:xfrm>
           <a:prstGeom prst="roundRect">
@@ -42097,7 +42108,7 @@
         </p:nvSpPr>
         <p:spPr>
           <a:xfrm>
-            <a:off x="548640" y="1965960"/>
+            <a:off x="566928" y="1975598"/>
             <a:ext cx="6858000" cy="2377440"/>
           </a:xfrm>
           <a:prstGeom prst="roundRect">
@@ -42124,7 +42135,7 @@
         </p:nvSpPr>
         <p:spPr>
           <a:xfrm>
-            <a:off x="804672" y="2231136"/>
+            <a:off x="804672" y="2148840"/>
             <a:ext cx="118872" cy="118872"/>
           </a:xfrm>
           <a:prstGeom prst="roundRect">
@@ -42151,7 +42162,7 @@
         </p:nvSpPr>
         <p:spPr>
           <a:xfrm>
-            <a:off x="1042416" y="2130552"/>
+            <a:off x="996696" y="2048256"/>
             <a:ext cx="6163056" cy="292608"/>
           </a:xfrm>
           <a:prstGeom prst="rect">
@@ -42190,7 +42201,7 @@
         </p:nvSpPr>
         <p:spPr>
           <a:xfrm>
-            <a:off x="804672" y="2514600"/>
+            <a:off x="789432" y="2353962"/>
             <a:ext cx="6355080" cy="1737360"/>
           </a:xfrm>
           <a:prstGeom prst="rect">
@@ -42260,7 +42271,29 @@
                 <a:ea typeface="Calibri" pitchFamily="34" charset="-122"/>
                 <a:cs typeface="Calibri" pitchFamily="34" charset="-120"/>
               </a:rPr>
-              <a:t>En 1947 Bernard Lewis Welch publicó una solución aproximada y utilizable: ajustar los grados de libertad en función de las dos varianzas y de los dos tamaños de muestra. No es exacta en el sentido matemático estricto — de hecho no existe una solución exacta simple — pero funciona muy bien en la práctica, y eso se ha confirmado en décadas de estudios de </a:t>
+              <a:t>En </a:t>
+            </a:r>
+            <a:r>
+              <a:rPr lang="en-US" sz="1150" b="1" dirty="0">
+                <a:solidFill>
+                  <a:srgbClr val="2C3A55"/>
+                </a:solidFill>
+                <a:latin typeface="Calibri" pitchFamily="34" charset="0"/>
+                <a:ea typeface="Calibri" pitchFamily="34" charset="-122"/>
+                <a:cs typeface="Calibri" pitchFamily="34" charset="-120"/>
+              </a:rPr>
+              <a:t>1947</a:t>
+            </a:r>
+            <a:r>
+              <a:rPr lang="en-US" sz="1150" dirty="0">
+                <a:solidFill>
+                  <a:srgbClr val="2C3A55"/>
+                </a:solidFill>
+                <a:latin typeface="Calibri" pitchFamily="34" charset="0"/>
+                <a:ea typeface="Calibri" pitchFamily="34" charset="-122"/>
+                <a:cs typeface="Calibri" pitchFamily="34" charset="-120"/>
+              </a:rPr>
+              <a:t> Bernard Lewis Welch publicó una solución aproximada y utilizable: ajustar los grados de libertad en función de las dos varianzas y de los dos tamaños de muestra. No es exacta en el sentido matemático estricto — de hecho no existe una solución exacta simple — pero funciona muy bien en la práctica, y eso se ha confirmado en décadas de estudios de </a:t>
             </a:r>
             <a:r>
               <a:rPr lang="en-US" sz="1150" dirty="0" err="1">
@@ -42750,7 +42783,7 @@
         </p:nvSpPr>
         <p:spPr>
           <a:xfrm>
-            <a:off x="548640" y="6108192"/>
+            <a:off x="544068" y="6300216"/>
             <a:ext cx="11064240" cy="292608"/>
           </a:xfrm>
           <a:prstGeom prst="rect">
